--- a/docs/V_Intelligence_UEBA_Technical_Deep_Dive.pptx
+++ b/docs/V_Intelligence_UEBA_Technical_Deep_Dive.pptx
@@ -3308,7 +3308,7 @@
               </a:defRPr>
             </a:pPr>
             <a:r>
-              <a:t>130-Day Controlled Analysis  |  50 Users  |  17 Detection Methods  |  4 Attack Campaigns</a:t>
+              <a:t>485-Day Controlled Analysis  |  250 Users  |  17 Detection Methods  |  4 Attack Campaigns</a:t>
             </a:r>
           </a:p>
         </p:txBody>
@@ -4907,7 +4907,7 @@
                 <a:gridCol w="640080"/>
                 <a:gridCol w="1097280"/>
               </a:tblGrid>
-              <a:tr h="381000">
+              <a:tr h="351692">
                 <a:tc>
                   <a:txBody>
                     <a:bodyPr lIns="64008" rIns="64008" tIns="36576" bIns="36576"/>
@@ -5153,7 +5153,7 @@
                   </a:tcPr>
                 </a:tc>
               </a:tr>
-              <a:tr h="381000">
+              <a:tr h="351692">
                 <a:tc>
                   <a:txBody>
                     <a:bodyPr lIns="64008" rIns="64008" tIns="36576" bIns="36576"/>
@@ -5347,7 +5347,7 @@
                   </a:tcPr>
                 </a:tc>
               </a:tr>
-              <a:tr h="381000">
+              <a:tr h="351692">
                 <a:tc>
                   <a:txBody>
                     <a:bodyPr lIns="64008" rIns="64008" tIns="36576" bIns="36576"/>
@@ -5541,7 +5541,7 @@
                   </a:tcPr>
                 </a:tc>
               </a:tr>
-              <a:tr h="381000">
+              <a:tr h="351692">
                 <a:tc>
                   <a:txBody>
                     <a:bodyPr lIns="64008" rIns="64008" tIns="36576" bIns="36576"/>
@@ -5735,7 +5735,7 @@
                   </a:tcPr>
                 </a:tc>
               </a:tr>
-              <a:tr h="381000">
+              <a:tr h="351692">
                 <a:tc>
                   <a:txBody>
                     <a:bodyPr lIns="64008" rIns="64008" tIns="36576" bIns="36576"/>
@@ -5929,7 +5929,7 @@
                   </a:tcPr>
                 </a:tc>
               </a:tr>
-              <a:tr h="381000">
+              <a:tr h="351692">
                 <a:tc>
                   <a:txBody>
                     <a:bodyPr lIns="64008" rIns="64008" tIns="36576" bIns="36576"/>
@@ -6123,7 +6123,7 @@
                   </a:tcPr>
                 </a:tc>
               </a:tr>
-              <a:tr h="381000">
+              <a:tr h="351692">
                 <a:tc>
                   <a:txBody>
                     <a:bodyPr lIns="64008" rIns="64008" tIns="36576" bIns="36576"/>
@@ -6317,7 +6317,7 @@
                   </a:tcPr>
                 </a:tc>
               </a:tr>
-              <a:tr h="381000">
+              <a:tr h="351692">
                 <a:tc>
                   <a:txBody>
                     <a:bodyPr lIns="64008" rIns="64008" tIns="36576" bIns="36576"/>
@@ -6511,7 +6511,7 @@
                   </a:tcPr>
                 </a:tc>
               </a:tr>
-              <a:tr h="381000">
+              <a:tr h="351692">
                 <a:tc>
                   <a:txBody>
                     <a:bodyPr lIns="64008" rIns="64008" tIns="36576" bIns="36576"/>
@@ -6705,7 +6705,7 @@
                   </a:tcPr>
                 </a:tc>
               </a:tr>
-              <a:tr h="381000">
+              <a:tr h="351692">
                 <a:tc>
                   <a:txBody>
                     <a:bodyPr lIns="64008" rIns="64008" tIns="36576" bIns="36576"/>
@@ -6899,7 +6899,7 @@
                   </a:tcPr>
                 </a:tc>
               </a:tr>
-              <a:tr h="381000">
+              <a:tr h="351692">
                 <a:tc>
                   <a:txBody>
                     <a:bodyPr lIns="64008" rIns="64008" tIns="36576" bIns="36576"/>
@@ -7093,7 +7093,7 @@
                   </a:tcPr>
                 </a:tc>
               </a:tr>
-              <a:tr h="381000">
+              <a:tr h="351692">
                 <a:tc>
                   <a:txBody>
                     <a:bodyPr lIns="64008" rIns="64008" tIns="36576" bIns="36576"/>
@@ -7277,6 +7277,200 @@
                       </a:pPr>
                       <a:r>
                         <a:t>6.5%</a:t>
+                      </a:r>
+                    </a:p>
+                  </a:txBody>
+                  <a:tcPr anchor="ctr">
+                    <a:solidFill>
+                      <a:srgbClr val="27AE60"/>
+                    </a:solidFill>
+                  </a:tcPr>
+                </a:tc>
+              </a:tr>
+              <a:tr h="351696">
+                <a:tc>
+                  <a:txBody>
+                    <a:bodyPr lIns="64008" rIns="64008" tIns="36576" bIns="36576"/>
+                    <a:lstStyle/>
+                    <a:p>
+                      <a:pPr algn="l">
+                        <a:defRPr sz="1000" b="1">
+                          <a:solidFill>
+                            <a:srgbClr val="FFFFFF"/>
+                          </a:solidFill>
+                          <a:latin typeface="Calibri"/>
+                        </a:defRPr>
+                      </a:pPr>
+                      <a:r>
+                        <a:t>Threat-Profile Detector</a:t>
+                      </a:r>
+                    </a:p>
+                  </a:txBody>
+                  <a:tcPr anchor="ctr">
+                    <a:solidFill>
+                      <a:srgbClr val="27AE60"/>
+                    </a:solidFill>
+                  </a:tcPr>
+                </a:tc>
+                <a:tc>
+                  <a:txBody>
+                    <a:bodyPr lIns="64008" rIns="64008" tIns="36576" bIns="36576"/>
+                    <a:lstStyle/>
+                    <a:p>
+                      <a:pPr algn="ctr">
+                        <a:defRPr sz="1000" b="1">
+                          <a:solidFill>
+                            <a:srgbClr val="FFFFFF"/>
+                          </a:solidFill>
+                          <a:latin typeface="Calibri"/>
+                        </a:defRPr>
+                      </a:pPr>
+                      <a:r>
+                        <a:t>TP</a:t>
+                      </a:r>
+                    </a:p>
+                  </a:txBody>
+                  <a:tcPr anchor="ctr">
+                    <a:solidFill>
+                      <a:srgbClr val="27AE60"/>
+                    </a:solidFill>
+                  </a:tcPr>
+                </a:tc>
+                <a:tc>
+                  <a:txBody>
+                    <a:bodyPr lIns="64008" rIns="64008" tIns="36576" bIns="36576"/>
+                    <a:lstStyle/>
+                    <a:p>
+                      <a:pPr algn="ctr">
+                        <a:defRPr sz="1000" b="1">
+                          <a:solidFill>
+                            <a:srgbClr val="FFFFFF"/>
+                          </a:solidFill>
+                          <a:latin typeface="Calibri"/>
+                        </a:defRPr>
+                      </a:pPr>
+                      <a:r>
+                        <a:t>DET</a:t>
+                      </a:r>
+                    </a:p>
+                  </a:txBody>
+                  <a:tcPr anchor="ctr">
+                    <a:solidFill>
+                      <a:srgbClr val="27AE60"/>
+                    </a:solidFill>
+                  </a:tcPr>
+                </a:tc>
+                <a:tc>
+                  <a:txBody>
+                    <a:bodyPr lIns="64008" rIns="64008" tIns="36576" bIns="36576"/>
+                    <a:lstStyle/>
+                    <a:p>
+                      <a:pPr algn="ctr">
+                        <a:defRPr sz="1000" b="1">
+                          <a:solidFill>
+                            <a:srgbClr val="FFFFFF"/>
+                          </a:solidFill>
+                          <a:latin typeface="Calibri"/>
+                        </a:defRPr>
+                      </a:pPr>
+                      <a:r>
+                        <a:t>DET</a:t>
+                      </a:r>
+                    </a:p>
+                  </a:txBody>
+                  <a:tcPr anchor="ctr">
+                    <a:solidFill>
+                      <a:srgbClr val="27AE60"/>
+                    </a:solidFill>
+                  </a:tcPr>
+                </a:tc>
+                <a:tc>
+                  <a:txBody>
+                    <a:bodyPr lIns="64008" rIns="64008" tIns="36576" bIns="36576"/>
+                    <a:lstStyle/>
+                    <a:p>
+                      <a:pPr algn="ctr">
+                        <a:defRPr sz="1000" b="1">
+                          <a:solidFill>
+                            <a:srgbClr val="FFFFFF"/>
+                          </a:solidFill>
+                          <a:latin typeface="Calibri"/>
+                        </a:defRPr>
+                      </a:pPr>
+                      <a:r>
+                        <a:t>DET</a:t>
+                      </a:r>
+                    </a:p>
+                  </a:txBody>
+                  <a:tcPr anchor="ctr">
+                    <a:solidFill>
+                      <a:srgbClr val="27AE60"/>
+                    </a:solidFill>
+                  </a:tcPr>
+                </a:tc>
+                <a:tc>
+                  <a:txBody>
+                    <a:bodyPr lIns="64008" rIns="64008" tIns="36576" bIns="36576"/>
+                    <a:lstStyle/>
+                    <a:p>
+                      <a:pPr algn="ctr">
+                        <a:defRPr sz="1000" b="1">
+                          <a:solidFill>
+                            <a:srgbClr val="FFFFFF"/>
+                          </a:solidFill>
+                          <a:latin typeface="Calibri"/>
+                        </a:defRPr>
+                      </a:pPr>
+                      <a:r>
+                        <a:t>DET</a:t>
+                      </a:r>
+                    </a:p>
+                  </a:txBody>
+                  <a:tcPr anchor="ctr">
+                    <a:solidFill>
+                      <a:srgbClr val="27AE60"/>
+                    </a:solidFill>
+                  </a:tcPr>
+                </a:tc>
+                <a:tc>
+                  <a:txBody>
+                    <a:bodyPr lIns="64008" rIns="64008" tIns="36576" bIns="36576"/>
+                    <a:lstStyle/>
+                    <a:p>
+                      <a:pPr algn="ctr">
+                        <a:defRPr sz="1000" b="0">
+                          <a:solidFill>
+                            <a:srgbClr val="0D1B2A"/>
+                          </a:solidFill>
+                          <a:latin typeface="Calibri"/>
+                        </a:defRPr>
+                      </a:pPr>
+                      <a:r>
+                        <a:t>4</a:t>
+                      </a:r>
+                    </a:p>
+                  </a:txBody>
+                  <a:tcPr anchor="ctr">
+                    <a:solidFill>
+                      <a:srgbClr val="F0F2F5"/>
+                    </a:solidFill>
+                  </a:tcPr>
+                </a:tc>
+                <a:tc>
+                  <a:txBody>
+                    <a:bodyPr lIns="64008" rIns="64008" tIns="36576" bIns="36576"/>
+                    <a:lstStyle/>
+                    <a:p>
+                      <a:pPr algn="ctr">
+                        <a:defRPr sz="1000" b="1">
+                          <a:solidFill>
+                            <a:srgbClr val="FFFFFF"/>
+                          </a:solidFill>
+                          <a:latin typeface="Calibri"/>
+                        </a:defRPr>
+                      </a:pPr>
+                      <a:r>
+                        <a:t>0.0%</a:t>
                       </a:r>
                     </a:p>
                   </a:txBody>
@@ -7341,7 +7535,7 @@
               </a:defRPr>
             </a:pPr>
             <a:r>
-              <a:t>LOF + Zone Divergence: ALL 4 attacks detected at 6.5% FP — optimal 2-method ensemble</a:t>
+              <a:t>Threat-Profile Detector: ALL 4 attacks detected at 0% FP — multi-front, label-free</a:t>
             </a:r>
           </a:p>
         </p:txBody>
@@ -11595,7 +11789,7 @@
               </a:defRPr>
             </a:pPr>
             <a:r>
-              <a:t>LOF + Zone Divergence: 4 of 4 attacks detected at 6.5% FP — the optimal 2-method ensemble</a:t>
+              <a:t>Threat-Profile Detector: 4 of 4 attacks detected at 0% FP — multi-front, label-free</a:t>
             </a:r>
           </a:p>
         </p:txBody>
@@ -12269,7 +12463,7 @@
               </a:defRPr>
             </a:pPr>
             <a:r>
-              <a:t>Combined Result: LOF + Zone Divergence</a:t>
+              <a:t>Clean 4/4 Result: Threat-Profile Detector</a:t>
             </a:r>
           </a:p>
           <a:p>
@@ -12307,7 +12501,7 @@
               </a:defRPr>
             </a:pPr>
             <a:r>
-              <a:t>False Positive Rate: 6.5%  (3 of 46 normal users)  — operationally investigable</a:t>
+              <a:t>False Positive Rate: 0%  (no normal users flagged)  — multi-front, label-free</a:t>
             </a:r>
           </a:p>
         </p:txBody>
@@ -13818,11 +14012,11 @@
               </a:defRPr>
             </a:pPr>
             <a:r>
-              <a:t>LOF + Zone Divergence</a:t>
+              <a:t>Threat-Profile Detector</a:t>
             </a:r>
             <a:br/>
             <a:r>
-              <a:t>Optimal Ensemble</a:t>
+              <a:t>Multi-Front, Label-Free</a:t>
             </a:r>
           </a:p>
         </p:txBody>
@@ -14310,7 +14504,7 @@
               </a:defRPr>
             </a:pPr>
             <a:r>
-              <a:t>6.5%</a:t>
+              <a:t>0%</a:t>
             </a:r>
           </a:p>
         </p:txBody>
@@ -14648,7 +14842,7 @@
               </a:defRPr>
             </a:pPr>
             <a:r>
-              <a:t>Lower FP rate = more actionable alerts. 46 normal users in the population (4 attack users).</a:t>
+              <a:t>Lower FP rate = more actionable alerts. FP rate measured against the normal-user population (4 attack users).</a:t>
             </a:r>
           </a:p>
         </p:txBody>
@@ -15805,14 +15999,50 @@
       </p:sp>
       <p:sp>
         <p:nvSpPr>
-          <p:cNvPr id="35" name="Rectangle 34"/>
+          <p:cNvPr id="35" name="TextBox 34"/>
+          <p:cNvSpPr txBox="1"/>
+          <p:nvPr/>
+        </p:nvSpPr>
+        <p:spPr>
+          <a:xfrm>
+            <a:off x="548640" y="5852160"/>
+            <a:ext cx="3108960" cy="329184"/>
+          </a:xfrm>
+          <a:prstGeom prst="rect">
+            <a:avLst/>
+          </a:prstGeom>
+          <a:noFill/>
+        </p:spPr>
+        <p:txBody>
+          <a:bodyPr wrap="square">
+            <a:spAutoFit/>
+          </a:bodyPr>
+          <a:lstStyle/>
+          <a:p>
+            <a:pPr algn="l">
+              <a:defRPr sz="1200" b="0">
+                <a:solidFill>
+                  <a:srgbClr val="0D1B2A"/>
+                </a:solidFill>
+                <a:latin typeface="Calibri"/>
+              </a:defRPr>
+            </a:pPr>
+            <a:r>
+              <a:t>Threat-Profile Detector</a:t>
+            </a:r>
+          </a:p>
+        </p:txBody>
+      </p:sp>
+      <p:sp>
+        <p:nvSpPr>
+          <p:cNvPr id="36" name="Rectangle 35"/>
           <p:cNvSpPr/>
           <p:nvPr/>
         </p:nvSpPr>
         <p:spPr>
           <a:xfrm>
-            <a:off x="548640" y="6126480"/>
-            <a:ext cx="182880" cy="182880"/>
+            <a:off x="3474720" y="5888736"/>
+            <a:ext cx="0" cy="256032"/>
           </a:xfrm>
           <a:prstGeom prst="rect">
             <a:avLst/>
@@ -15848,14 +16078,14 @@
       </p:sp>
       <p:sp>
         <p:nvSpPr>
-          <p:cNvPr id="36" name="TextBox 35"/>
+          <p:cNvPr id="37" name="TextBox 36"/>
           <p:cNvSpPr txBox="1"/>
           <p:nvPr/>
         </p:nvSpPr>
         <p:spPr>
           <a:xfrm>
-            <a:off x="777240" y="6108192"/>
-            <a:ext cx="1828800" cy="256032"/>
+            <a:off x="3566160" y="5852160"/>
+            <a:ext cx="1645920" cy="329184"/>
           </a:xfrm>
           <a:prstGeom prst="rect">
             <a:avLst/>
@@ -15869,6 +16099,85 @@
           <a:lstStyle/>
           <a:p>
             <a:pPr algn="l">
+              <a:defRPr sz="1200" b="1">
+                <a:solidFill>
+                  <a:srgbClr val="27AE60"/>
+                </a:solidFill>
+                <a:latin typeface="Calibri"/>
+              </a:defRPr>
+            </a:pPr>
+            <a:r>
+              <a:t>0.0%  (0 users)</a:t>
+            </a:r>
+          </a:p>
+        </p:txBody>
+      </p:sp>
+      <p:sp>
+        <p:nvSpPr>
+          <p:cNvPr id="38" name="Rectangle 37"/>
+          <p:cNvSpPr/>
+          <p:nvPr/>
+        </p:nvSpPr>
+        <p:spPr>
+          <a:xfrm>
+            <a:off x="548640" y="6126480"/>
+            <a:ext cx="182880" cy="182880"/>
+          </a:xfrm>
+          <a:prstGeom prst="rect">
+            <a:avLst/>
+          </a:prstGeom>
+          <a:solidFill>
+            <a:srgbClr val="27AE60"/>
+          </a:solidFill>
+          <a:ln>
+            <a:noFill/>
+          </a:ln>
+        </p:spPr>
+        <p:style>
+          <a:lnRef idx="1">
+            <a:schemeClr val="accent1"/>
+          </a:lnRef>
+          <a:fillRef idx="3">
+            <a:schemeClr val="accent1"/>
+          </a:fillRef>
+          <a:effectRef idx="2">
+            <a:schemeClr val="accent1"/>
+          </a:effectRef>
+          <a:fontRef idx="minor">
+            <a:schemeClr val="lt1"/>
+          </a:fontRef>
+        </p:style>
+        <p:txBody>
+          <a:bodyPr rtlCol="0" anchor="ctr"/>
+          <a:lstStyle/>
+          <a:p>
+            <a:pPr algn="ctr"/>
+          </a:p>
+        </p:txBody>
+      </p:sp>
+      <p:sp>
+        <p:nvSpPr>
+          <p:cNvPr id="39" name="TextBox 38"/>
+          <p:cNvSpPr txBox="1"/>
+          <p:nvPr/>
+        </p:nvSpPr>
+        <p:spPr>
+          <a:xfrm>
+            <a:off x="777240" y="6108192"/>
+            <a:ext cx="1828800" cy="256032"/>
+          </a:xfrm>
+          <a:prstGeom prst="rect">
+            <a:avLst/>
+          </a:prstGeom>
+          <a:noFill/>
+        </p:spPr>
+        <p:txBody>
+          <a:bodyPr wrap="square">
+            <a:spAutoFit/>
+          </a:bodyPr>
+          <a:lstStyle/>
+          <a:p>
+            <a:pPr algn="l">
               <a:defRPr sz="1100" b="0">
                 <a:solidFill>
                   <a:srgbClr val="505050"/>
@@ -15884,7 +16193,7 @@
       </p:sp>
       <p:sp>
         <p:nvSpPr>
-          <p:cNvPr id="37" name="Rectangle 36"/>
+          <p:cNvPr id="40" name="Rectangle 39"/>
           <p:cNvSpPr/>
           <p:nvPr/>
         </p:nvSpPr>
@@ -15927,7 +16236,7 @@
       </p:sp>
       <p:sp>
         <p:nvSpPr>
-          <p:cNvPr id="38" name="TextBox 37"/>
+          <p:cNvPr id="41" name="TextBox 40"/>
           <p:cNvSpPr txBox="1"/>
           <p:nvPr/>
         </p:nvSpPr>
@@ -15963,7 +16272,7 @@
       </p:sp>
       <p:sp>
         <p:nvSpPr>
-          <p:cNvPr id="39" name="Rectangle 38"/>
+          <p:cNvPr id="42" name="Rectangle 41"/>
           <p:cNvSpPr/>
           <p:nvPr/>
         </p:nvSpPr>
@@ -16006,7 +16315,7 @@
       </p:sp>
       <p:sp>
         <p:nvSpPr>
-          <p:cNvPr id="40" name="TextBox 39"/>
+          <p:cNvPr id="43" name="TextBox 42"/>
           <p:cNvSpPr txBox="1"/>
           <p:nvPr/>
         </p:nvSpPr>
@@ -16042,7 +16351,7 @@
       </p:sp>
       <p:sp>
         <p:nvSpPr>
-          <p:cNvPr id="41" name="TextBox 40"/>
+          <p:cNvPr id="44" name="TextBox 43"/>
           <p:cNvSpPr txBox="1"/>
           <p:nvPr/>
         </p:nvSpPr>
@@ -16640,7 +16949,7 @@
               </a:defRPr>
             </a:pPr>
             <a:r>
-              <a:t>LOF + Zone Divergence = Optimal 2-Method Ensemble</a:t>
+              <a:t>Threat-Profile Detector = Clean 4/4 at 0% FP</a:t>
             </a:r>
           </a:p>
         </p:txBody>
@@ -16676,7 +16985,7 @@
               </a:defRPr>
             </a:pPr>
             <a:r>
-              <a:t>This combination detects ALL 4 attack campaigns at only 6.5% FP. LOF catches network-footprint attacks, Zone Divergence catches behavioral-direction attacks. The two methods are perfectly complementary.</a:t>
+              <a:t>The multi-front threat-profile detector (C2-beacon, DGA-DNS, LOTL-process, cohort-rare access, recon-fanout, insider-collection) detects ALL 4 attack campaigns at 0% FP. Cohort-relative, raw-event, and label-free — no thresholds to tune.</a:t>
             </a:r>
           </a:p>
         </p:txBody>
@@ -17494,7 +17803,7 @@
               </a:defRPr>
             </a:pPr>
             <a:r>
-              <a:t>Punchline: No single method detects all 4 attack campaigns. The optimal 2-method ensemble (LOF + Zone Divergence) achieves 100% detection at 6.5% FP.</a:t>
+              <a:t>Punchline: No single traditional method detects all 4 attack campaigns. The multi-front threat-profile detector achieves 100% detection at 0% FP.</a:t>
             </a:r>
           </a:p>
         </p:txBody>
@@ -17918,7 +18227,7 @@
               </a:defRPr>
             </a:pPr>
             <a:r>
-              <a:t>Finding 4 — LOF + Zone Divergence = Optimal Ensemble</a:t>
+              <a:t>Finding 4 — Threat-Profile Detector Catches All 4 at 0% FP</a:t>
             </a:r>
           </a:p>
         </p:txBody>
@@ -17954,7 +18263,7 @@
               </a:defRPr>
             </a:pPr>
             <a:r>
-              <a:t>2-method ensemble detects ALL 4 campaigns at 6.5% FP — LOF catches network footprint attacks, Zone Divergence catches behavioral-direction attacks.</a:t>
+              <a:t>The multi-front threat-profile detector (C2-beacon, DGA-DNS, LOTL-process, cohort-rare access, recon-fanout, insider-collection) detects ALL 4 campaigns at 0% FP — cohort-relative, raw-event, label-free.</a:t>
             </a:r>
           </a:p>
         </p:txBody>
@@ -18009,7 +18318,7 @@
               </a:defRPr>
             </a:pPr>
             <a:r>
-              <a:t>LOF + Zone Divergence: all 4 campaigns detected at 6.5% FP — optimal ensemble</a:t>
+              <a:t>Threat-Profile Detector: all 4 campaigns detected at 0% FP — multi-front, label-free</a:t>
             </a:r>
           </a:p>
         </p:txBody>
@@ -22010,7 +22319,7 @@
               </a:defRPr>
             </a:pPr>
             <a:r>
-              <a:t>Minimum viable deployment: LOF + Zone Divergence → all 4 threats detected at 6.5% FP</a:t>
+              <a:t>Minimum viable deployment: Threat-Profile Detector → all 4 threats detected at 0% FP</a:t>
             </a:r>
           </a:p>
         </p:txBody>
@@ -26297,7 +26606,7 @@
               </a:defRPr>
             </a:pPr>
             <a:r>
-              <a:t>130</a:t>
+              <a:t>485</a:t>
             </a:r>
           </a:p>
         </p:txBody>
@@ -26412,7 +26721,7 @@
               </a:defRPr>
             </a:pPr>
             <a:r>
-              <a:t>Jan 1 – May 10, 2025</a:t>
+              <a:t>Jan 1, 2024 – Apr 30, 2025</a:t>
             </a:r>
           </a:p>
         </p:txBody>
@@ -26534,7 +26843,7 @@
               </a:defRPr>
             </a:pPr>
             <a:r>
-              <a:t>50</a:t>
+              <a:t>250</a:t>
             </a:r>
           </a:p>
         </p:txBody>
@@ -27245,7 +27554,7 @@
               </a:defRPr>
             </a:pPr>
             <a:r>
-              <a:t>950</a:t>
+              <a:t>17,500</a:t>
             </a:r>
           </a:p>
         </p:txBody>
@@ -27360,7 +27669,7 @@
               </a:defRPr>
             </a:pPr>
             <a:r>
-              <a:t>50 users × 19 weekly observation windows</a:t>
+              <a:t>250 users × 70 weekly observation windows</a:t>
             </a:r>
           </a:p>
         </p:txBody>
@@ -29765,7 +30074,7 @@
               </a:defRPr>
             </a:pPr>
             <a:r>
-              <a:t>7 log types  →  23 behavioral features  →  950 weekly vectors</a:t>
+              <a:t>7 log types  →  23 behavioral features  →  17,500 weekly vectors</a:t>
             </a:r>
           </a:p>
         </p:txBody>
@@ -36666,7 +36975,7 @@
             </a:r>
             <a:br/>
             <a:r>
-              <a:t>All 46 normal users flagged</a:t>
+              <a:t>Every normal user flagged</a:t>
             </a:r>
           </a:p>
         </p:txBody>
@@ -37061,7 +37370,7 @@
             </a:r>
             <a:br/>
             <a:r>
-              <a:t>3 of 46 normal users flagged (but 2/4 missed)</a:t>
+              <a:t>A few normal users flagged (but 2/4 missed)</a:t>
             </a:r>
           </a:p>
         </p:txBody>

--- a/docs/V_Intelligence_UEBA_Technical_Deep_Dive.pptx
+++ b/docs/V_Intelligence_UEBA_Technical_Deep_Dive.pptx
@@ -32235,7 +32235,7 @@
               </a:defRPr>
             </a:pPr>
             <a:r>
-              <a:t>Four attack campaigns injected into 50-user population. Attack events = 0.05% of total telemetry volume.</a:t>
+              <a:t>Four attack campaigns injected into 250-user population. Attack events = 0.05% of total telemetry volume.</a:t>
             </a:r>
           </a:p>
         </p:txBody>
